--- a/assets/pptx/catalog-268.pptx
+++ b/assets/pptx/catalog-268.pptx
@@ -3448,7 +3448,7 @@
                 <a:ea typeface="Ebrima"/>
                 <a:cs typeface="Ebrima"/>
               </a:rPr>
-              <a:t>ምሥጋና ምሥጋና (5x)</a:t>
+              <a:t>ምሥጋና ምሥጋና 5x</a:t>
             </a:r>
           </a:p>
           <a:p>
@@ -3726,7 +3726,7 @@
                 <a:ea typeface="Ebrima"/>
                 <a:cs typeface="Ebrima"/>
               </a:rPr>
-              <a:t>ምሥጋና ምሥጋና (5x)</a:t>
+              <a:t>ምሥጋና ምሥጋና 5x</a:t>
             </a:r>
           </a:p>
           <a:p>
@@ -4004,7 +4004,7 @@
                 <a:ea typeface="Ebrima"/>
                 <a:cs typeface="Ebrima"/>
               </a:rPr>
-              <a:t>ምሥጋና ምሥጋና (5x)</a:t>
+              <a:t>ምሥጋና ምሥጋና 5x</a:t>
             </a:r>
           </a:p>
           <a:p>
@@ -4089,7 +4089,7 @@
                 <a:ea typeface="Ebrima"/>
                 <a:cs typeface="Ebrima"/>
               </a:rPr>
-              <a:t>ልዑል ሆይ ለሥምህ ክብር ዘምራለሁ (2x)</a:t>
+              <a:t>ልዑል ሆይ ለሥምህ ክብር ዘምራለሁ 2x</a:t>
             </a:r>
           </a:p>
           <a:p>
@@ -4125,7 +4125,7 @@
                 <a:ea typeface="Ebrima"/>
                 <a:cs typeface="Ebrima"/>
               </a:rPr>
-              <a:t>ኢየሱስ ለሥምህ ክብር ዘምራለሁ (2x)</a:t>
+              <a:t>ኢየሱስ ለሥምህ ክብር ዘምራለሁ 2x</a:t>
             </a:r>
           </a:p>
           <a:p>
@@ -4143,7 +4143,7 @@
                 <a:ea typeface="Ebrima"/>
                 <a:cs typeface="Ebrima"/>
               </a:rPr>
-              <a:t>ምሥጋናህም ዘወትር ዘወትር በአፌ ነው (2x)</a:t>
+              <a:t>ምሥጋናህም ዘወትር ዘወትር በአፌ ነው 2x</a:t>
             </a:r>
           </a:p>
         </p:txBody>
@@ -4331,7 +4331,7 @@
                 <a:ea typeface="Ebrima"/>
                 <a:cs typeface="Ebrima"/>
               </a:rPr>
-              <a:t>ልዑል ሆይ ለሥምህ ክብር ዘምራለሁ (2x)</a:t>
+              <a:t>ልዑል ሆይ ለሥምህ ክብር ዘምራለሁ 2x</a:t>
             </a:r>
           </a:p>
           <a:p>
@@ -4367,7 +4367,7 @@
                 <a:ea typeface="Ebrima"/>
                 <a:cs typeface="Ebrima"/>
               </a:rPr>
-              <a:t>ኢየሱስ ለሥምህ ክብር ዘምራለሁ (2x)</a:t>
+              <a:t>ኢየሱስ ለሥምህ ክብር ዘምራለሁ 2x</a:t>
             </a:r>
           </a:p>
           <a:p>
@@ -4573,7 +4573,7 @@
                 <a:ea typeface="Ebrima"/>
                 <a:cs typeface="Ebrima"/>
               </a:rPr>
-              <a:t>ልዑል ሆይ ለሥምህ ክብር ዘምራለሁ (2x)</a:t>
+              <a:t>ልዑል ሆይ ለሥምህ ክብር ዘምራለሁ 2x</a:t>
             </a:r>
           </a:p>
           <a:p>
@@ -4609,7 +4609,7 @@
                 <a:ea typeface="Ebrima"/>
                 <a:cs typeface="Ebrima"/>
               </a:rPr>
-              <a:t>ኢየሱስ ለሥምህ ክብር ዘምራለሁ (2x)</a:t>
+              <a:t>ኢየሱስ ለሥምህ ክብር ዘምራለሁ 2x</a:t>
             </a:r>
           </a:p>
           <a:p>
@@ -4815,7 +4815,7 @@
                 <a:ea typeface="Ebrima"/>
                 <a:cs typeface="Ebrima"/>
               </a:rPr>
-              <a:t>ልዑል ሆይ ለሥምህ ክብር ዘምራለሁ (2x)</a:t>
+              <a:t>ልዑል ሆይ ለሥምህ ክብር ዘምራለሁ 2x</a:t>
             </a:r>
           </a:p>
           <a:p>
@@ -4851,7 +4851,7 @@
                 <a:ea typeface="Ebrima"/>
                 <a:cs typeface="Ebrima"/>
               </a:rPr>
-              <a:t>ኢየሱስ ለሥምህ ክብር ዘምራለሁ (2x)</a:t>
+              <a:t>ኢየሱስ ለሥምህ ክብር ዘምራለሁ 2x</a:t>
             </a:r>
           </a:p>
           <a:p>
@@ -4972,7 +4972,7 @@
                 <a:ea typeface="Ebrima"/>
                 <a:cs typeface="Ebrima"/>
               </a:rPr>
-              <a:t>እኔም አንተን ሳከብር (እጅግ) ደስ ይለኛል</a:t>
+              <a:t>እኔም አንተን ሳከብር እጅግ ደስ ይለኛል</a:t>
             </a:r>
           </a:p>
           <a:p>
@@ -5057,7 +5057,7 @@
                 <a:ea typeface="Ebrima"/>
                 <a:cs typeface="Ebrima"/>
               </a:rPr>
-              <a:t>ምሥጋና ምሥጋና (5x)</a:t>
+              <a:t>ምሥጋና ምሥጋና 5x</a:t>
             </a:r>
           </a:p>
           <a:p>
